--- a/examples/repositories/presentation-skill-showcase/deck.pptx
+++ b/examples/repositories/presentation-skill-showcase/deck.pptx
@@ -1517,7 +1517,7 @@
             <a:r>
               <a:rPr lang="en-US" sz="900" b="1" spc="110" kern="0" dirty="0">
                 <a:solidFill>
-                  <a:srgbClr val="7C3AED"/>
+                  <a:srgbClr val="B793F5"/>
                 </a:solidFill>
                 <a:latin typeface="BIZ UDPGothic" pitchFamily="34" charset="0"/>
                 <a:ea typeface="BIZ UDPGothic" pitchFamily="34" charset="-122"/>
@@ -1589,7 +1589,7 @@
                 <a:ea typeface="Shippori Mincho" pitchFamily="34" charset="-122"/>
                 <a:cs typeface="Shippori Mincho" pitchFamily="34" charset="-120"/>
               </a:rPr>
-              <a:t>仕事の引き継ぎを、</a:t>
+              <a:t>引き継ぎメモを</a:t>
             </a:r>
             <a:endParaRPr lang="en-US" sz="4500" dirty="0"/>
           </a:p>
@@ -1606,7 +1606,7 @@
                 <a:ea typeface="Shippori Mincho" pitchFamily="34" charset="-122"/>
                 <a:cs typeface="Shippori Mincho" pitchFamily="34" charset="-120"/>
               </a:rPr>
-              <a:t>迷わない一枚に。</a:t>
+              <a:t>一枚にまとめる</a:t>
             </a:r>
             <a:endParaRPr lang="en-US" sz="4500" dirty="0"/>
           </a:p>
@@ -1966,7 +1966,7 @@
         </p:nvSpPr>
         <p:spPr>
           <a:xfrm>
-            <a:off x="457200" y="91440"/>
+            <a:off x="457200" y="310896"/>
             <a:ext cx="8229600" cy="528320"/>
           </a:xfrm>
           <a:prstGeom prst="rect">
@@ -2005,7 +2005,7 @@
         </p:nvSpPr>
         <p:spPr>
           <a:xfrm>
-            <a:off x="457200" y="665480"/>
+            <a:off x="457200" y="884936"/>
             <a:ext cx="8229600" cy="292608"/>
           </a:xfrm>
           <a:prstGeom prst="rect">
@@ -2044,7 +2044,7 @@
         </p:nvSpPr>
         <p:spPr>
           <a:xfrm>
-            <a:off x="457200" y="1305560"/>
+            <a:off x="457200" y="1525016"/>
             <a:ext cx="8229600" cy="0"/>
           </a:xfrm>
           <a:prstGeom prst="line">
@@ -2067,7 +2067,7 @@
         </p:nvSpPr>
         <p:spPr>
           <a:xfrm>
-            <a:off x="530352" y="1369568"/>
+            <a:off x="530352" y="1589024"/>
             <a:ext cx="2322576" cy="397256"/>
           </a:xfrm>
           <a:prstGeom prst="rect">
@@ -2106,7 +2106,7 @@
         </p:nvSpPr>
         <p:spPr>
           <a:xfrm>
-            <a:off x="3127248" y="1369568"/>
+            <a:off x="3127248" y="1589024"/>
             <a:ext cx="5413248" cy="397256"/>
           </a:xfrm>
           <a:prstGeom prst="rect">
@@ -2145,7 +2145,7 @@
         </p:nvSpPr>
         <p:spPr>
           <a:xfrm>
-            <a:off x="457200" y="1922272"/>
+            <a:off x="457200" y="2141728"/>
             <a:ext cx="8229600" cy="0"/>
           </a:xfrm>
           <a:prstGeom prst="line">
@@ -2168,7 +2168,7 @@
         </p:nvSpPr>
         <p:spPr>
           <a:xfrm>
-            <a:off x="530352" y="1986280"/>
+            <a:off x="530352" y="2205736"/>
             <a:ext cx="2322576" cy="397256"/>
           </a:xfrm>
           <a:prstGeom prst="rect">
@@ -2207,7 +2207,7 @@
         </p:nvSpPr>
         <p:spPr>
           <a:xfrm>
-            <a:off x="3127248" y="1986280"/>
+            <a:off x="3127248" y="2205736"/>
             <a:ext cx="5413248" cy="397256"/>
           </a:xfrm>
           <a:prstGeom prst="rect">
@@ -2246,7 +2246,7 @@
         </p:nvSpPr>
         <p:spPr>
           <a:xfrm>
-            <a:off x="457200" y="2538984"/>
+            <a:off x="457200" y="2758440"/>
             <a:ext cx="8229600" cy="0"/>
           </a:xfrm>
           <a:prstGeom prst="line">
@@ -2269,7 +2269,7 @@
         </p:nvSpPr>
         <p:spPr>
           <a:xfrm>
-            <a:off x="530352" y="2602992"/>
+            <a:off x="530352" y="2822448"/>
             <a:ext cx="2322576" cy="397256"/>
           </a:xfrm>
           <a:prstGeom prst="rect">
@@ -2308,7 +2308,7 @@
         </p:nvSpPr>
         <p:spPr>
           <a:xfrm>
-            <a:off x="3127248" y="2602992"/>
+            <a:off x="3127248" y="2822448"/>
             <a:ext cx="5413248" cy="397256"/>
           </a:xfrm>
           <a:prstGeom prst="rect">
@@ -2755,7 +2755,7 @@
         </p:nvSpPr>
         <p:spPr>
           <a:xfrm>
-            <a:off x="457200" y="91440"/>
+            <a:off x="457200" y="310896"/>
             <a:ext cx="8229600" cy="528320"/>
           </a:xfrm>
           <a:prstGeom prst="rect">
@@ -2794,7 +2794,7 @@
         </p:nvSpPr>
         <p:spPr>
           <a:xfrm>
-            <a:off x="457200" y="665480"/>
+            <a:off x="457200" y="884936"/>
             <a:ext cx="8229600" cy="292608"/>
           </a:xfrm>
           <a:prstGeom prst="rect">
@@ -2833,7 +2833,7 @@
         </p:nvSpPr>
         <p:spPr>
           <a:xfrm>
-            <a:off x="539496" y="1872488"/>
+            <a:off x="539496" y="2091944"/>
             <a:ext cx="6345936" cy="0"/>
           </a:xfrm>
           <a:prstGeom prst="line">
@@ -2856,7 +2856,7 @@
         </p:nvSpPr>
         <p:spPr>
           <a:xfrm>
-            <a:off x="457200" y="1351280"/>
+            <a:off x="457200" y="1570736"/>
             <a:ext cx="1892808" cy="365760"/>
           </a:xfrm>
           <a:prstGeom prst="rect">
@@ -2895,7 +2895,7 @@
         </p:nvSpPr>
         <p:spPr>
           <a:xfrm>
-            <a:off x="457200" y="1799336"/>
+            <a:off x="457200" y="2018792"/>
             <a:ext cx="146304" cy="146304"/>
           </a:xfrm>
           <a:prstGeom prst="ellipse">
@@ -2920,7 +2920,7 @@
         </p:nvSpPr>
         <p:spPr>
           <a:xfrm>
-            <a:off x="457200" y="2110232"/>
+            <a:off x="457200" y="2329688"/>
             <a:ext cx="1892808" cy="438912"/>
           </a:xfrm>
           <a:prstGeom prst="rect">
@@ -2959,8 +2959,8 @@
         </p:nvSpPr>
         <p:spPr>
           <a:xfrm>
-            <a:off x="457200" y="2695448"/>
-            <a:ext cx="1892808" cy="1433068"/>
+            <a:off x="457200" y="2914904"/>
+            <a:ext cx="1892808" cy="1213612"/>
           </a:xfrm>
           <a:prstGeom prst="rect">
             <a:avLst/>
@@ -3015,7 +3015,7 @@
         </p:nvSpPr>
         <p:spPr>
           <a:xfrm>
-            <a:off x="2569464" y="1351280"/>
+            <a:off x="2569464" y="1570736"/>
             <a:ext cx="1892808" cy="365760"/>
           </a:xfrm>
           <a:prstGeom prst="rect">
@@ -3054,7 +3054,7 @@
         </p:nvSpPr>
         <p:spPr>
           <a:xfrm>
-            <a:off x="2569464" y="1799336"/>
+            <a:off x="2569464" y="2018792"/>
             <a:ext cx="146304" cy="146304"/>
           </a:xfrm>
           <a:prstGeom prst="ellipse">
@@ -3079,7 +3079,7 @@
         </p:nvSpPr>
         <p:spPr>
           <a:xfrm>
-            <a:off x="2569464" y="2110232"/>
+            <a:off x="2569464" y="2329688"/>
             <a:ext cx="1892808" cy="438912"/>
           </a:xfrm>
           <a:prstGeom prst="rect">
@@ -3118,8 +3118,8 @@
         </p:nvSpPr>
         <p:spPr>
           <a:xfrm>
-            <a:off x="2569464" y="2695448"/>
-            <a:ext cx="1892808" cy="1433068"/>
+            <a:off x="2569464" y="2914904"/>
+            <a:ext cx="1892808" cy="1213612"/>
           </a:xfrm>
           <a:prstGeom prst="rect">
             <a:avLst/>
@@ -3174,7 +3174,7 @@
         </p:nvSpPr>
         <p:spPr>
           <a:xfrm>
-            <a:off x="4681728" y="1351280"/>
+            <a:off x="4681728" y="1570736"/>
             <a:ext cx="1892808" cy="365760"/>
           </a:xfrm>
           <a:prstGeom prst="rect">
@@ -3213,7 +3213,7 @@
         </p:nvSpPr>
         <p:spPr>
           <a:xfrm>
-            <a:off x="4681728" y="1799336"/>
+            <a:off x="4681728" y="2018792"/>
             <a:ext cx="146304" cy="146304"/>
           </a:xfrm>
           <a:prstGeom prst="ellipse">
@@ -3238,7 +3238,7 @@
         </p:nvSpPr>
         <p:spPr>
           <a:xfrm>
-            <a:off x="4681728" y="2110232"/>
+            <a:off x="4681728" y="2329688"/>
             <a:ext cx="1892808" cy="438912"/>
           </a:xfrm>
           <a:prstGeom prst="rect">
@@ -3277,8 +3277,8 @@
         </p:nvSpPr>
         <p:spPr>
           <a:xfrm>
-            <a:off x="4681728" y="2695448"/>
-            <a:ext cx="1892808" cy="1433068"/>
+            <a:off x="4681728" y="2914904"/>
+            <a:ext cx="1892808" cy="1213612"/>
           </a:xfrm>
           <a:prstGeom prst="rect">
             <a:avLst/>
@@ -3333,7 +3333,7 @@
         </p:nvSpPr>
         <p:spPr>
           <a:xfrm>
-            <a:off x="6793992" y="1351280"/>
+            <a:off x="6793992" y="1570736"/>
             <a:ext cx="1892808" cy="365760"/>
           </a:xfrm>
           <a:prstGeom prst="rect">
@@ -3372,7 +3372,7 @@
         </p:nvSpPr>
         <p:spPr>
           <a:xfrm>
-            <a:off x="6793992" y="1799336"/>
+            <a:off x="6793992" y="2018792"/>
             <a:ext cx="146304" cy="146304"/>
           </a:xfrm>
           <a:prstGeom prst="ellipse">
@@ -3397,7 +3397,7 @@
         </p:nvSpPr>
         <p:spPr>
           <a:xfrm>
-            <a:off x="6793992" y="2110232"/>
+            <a:off x="6793992" y="2329688"/>
             <a:ext cx="1892808" cy="438912"/>
           </a:xfrm>
           <a:prstGeom prst="rect">
@@ -3436,8 +3436,8 @@
         </p:nvSpPr>
         <p:spPr>
           <a:xfrm>
-            <a:off x="6793992" y="2695448"/>
-            <a:ext cx="1892808" cy="1433068"/>
+            <a:off x="6793992" y="2914904"/>
+            <a:ext cx="1892808" cy="1213612"/>
           </a:xfrm>
           <a:prstGeom prst="rect">
             <a:avLst/>
@@ -3836,7 +3836,7 @@
         </p:nvSpPr>
         <p:spPr>
           <a:xfrm>
-            <a:off x="457200" y="91440"/>
+            <a:off x="457200" y="310896"/>
             <a:ext cx="8229600" cy="528320"/>
           </a:xfrm>
           <a:prstGeom prst="rect">
@@ -3875,7 +3875,7 @@
         </p:nvSpPr>
         <p:spPr>
           <a:xfrm>
-            <a:off x="457200" y="665480"/>
+            <a:off x="457200" y="884936"/>
             <a:ext cx="8229600" cy="292608"/>
           </a:xfrm>
           <a:prstGeom prst="rect">
@@ -3914,7 +3914,7 @@
         </p:nvSpPr>
         <p:spPr>
           <a:xfrm>
-            <a:off x="566928" y="1378712"/>
+            <a:off x="566928" y="1598168"/>
             <a:ext cx="969264" cy="283464"/>
           </a:xfrm>
           <a:prstGeom prst="rect">
@@ -3953,7 +3953,7 @@
         </p:nvSpPr>
         <p:spPr>
           <a:xfrm>
-            <a:off x="1645920" y="1378712"/>
+            <a:off x="1645920" y="1598168"/>
             <a:ext cx="6931152" cy="283464"/>
           </a:xfrm>
           <a:prstGeom prst="rect">
@@ -3978,7 +3978,7 @@
                 <a:ea typeface="BIZ UDPGothic" pitchFamily="34" charset="-122"/>
                 <a:cs typeface="BIZ UDPGothic" pitchFamily="34" charset="-120"/>
               </a:rPr>
-              <a:t>4項目 | 項目 | 担当 | 期限（仮） | 状態例 | 次に動く条件</a:t>
+              <a:t>4件の記入例</a:t>
             </a:r>
             <a:endParaRPr lang="en-US" sz="900" dirty="0"/>
           </a:p>
@@ -3999,7 +3999,7 @@
           </p:nvPr>
         </p:nvGraphicFramePr>
         <p:xfrm>
-          <a:off x="457200" y="1963420"/>
+          <a:off x="457200" y="2138985"/>
           <a:ext cx="8229600" cy="1757680"/>
         </p:xfrm>
         <a:graphic>
@@ -5135,7 +5135,7 @@
         </p:nvSpPr>
         <p:spPr>
           <a:xfrm>
-            <a:off x="457200" y="3794252"/>
+            <a:off x="457200" y="3969817"/>
             <a:ext cx="8229600" cy="283464"/>
           </a:xfrm>
           <a:prstGeom prst="rect">
@@ -5152,7 +5152,7 @@
               <a:buNone/>
             </a:pPr>
             <a:r>
-              <a:rPr lang="en-US" sz="900" i="1" dirty="0">
+              <a:rPr lang="en-US" sz="900" dirty="0">
                 <a:solidFill>
                   <a:srgbClr val="6D28D9"/>
                 </a:solidFill>
@@ -5479,7 +5479,7 @@
         </p:nvSpPr>
         <p:spPr>
           <a:xfrm>
-            <a:off x="457200" y="91440"/>
+            <a:off x="457200" y="310896"/>
             <a:ext cx="8229600" cy="528320"/>
           </a:xfrm>
           <a:prstGeom prst="rect">
@@ -5518,7 +5518,7 @@
         </p:nvSpPr>
         <p:spPr>
           <a:xfrm>
-            <a:off x="457200" y="665480"/>
+            <a:off x="457200" y="884936"/>
             <a:ext cx="8229600" cy="292608"/>
           </a:xfrm>
           <a:prstGeom prst="rect">
@@ -5557,8 +5557,8 @@
         </p:nvSpPr>
         <p:spPr>
           <a:xfrm>
-            <a:off x="457200" y="1305560"/>
-            <a:ext cx="3785616" cy="2356612"/>
+            <a:off x="457200" y="1525016"/>
+            <a:ext cx="3785616" cy="2137156"/>
           </a:xfrm>
           <a:prstGeom prst="rect">
             <a:avLst/>
@@ -5582,7 +5582,7 @@
         </p:nvSpPr>
         <p:spPr>
           <a:xfrm>
-            <a:off x="603504" y="1451864"/>
+            <a:off x="603504" y="1671320"/>
             <a:ext cx="3493008" cy="397256"/>
           </a:xfrm>
           <a:prstGeom prst="rect">
@@ -5621,7 +5621,7 @@
         </p:nvSpPr>
         <p:spPr>
           <a:xfrm>
-            <a:off x="603504" y="1940560"/>
+            <a:off x="603504" y="2160016"/>
             <a:ext cx="3493008" cy="1177544"/>
           </a:xfrm>
           <a:prstGeom prst="rect">
@@ -5711,8 +5711,8 @@
         </p:nvSpPr>
         <p:spPr>
           <a:xfrm>
-            <a:off x="4901184" y="1305560"/>
-            <a:ext cx="3785616" cy="2356612"/>
+            <a:off x="4901184" y="1525016"/>
+            <a:ext cx="3785616" cy="2137156"/>
           </a:xfrm>
           <a:prstGeom prst="rect">
             <a:avLst/>
@@ -5736,7 +5736,7 @@
         </p:nvSpPr>
         <p:spPr>
           <a:xfrm>
-            <a:off x="5047488" y="1451864"/>
+            <a:off x="5047488" y="1671320"/>
             <a:ext cx="3493008" cy="397256"/>
           </a:xfrm>
           <a:prstGeom prst="rect">
@@ -5775,7 +5775,7 @@
         </p:nvSpPr>
         <p:spPr>
           <a:xfrm>
-            <a:off x="5047488" y="1940560"/>
+            <a:off x="5047488" y="2160016"/>
             <a:ext cx="3493008" cy="1177544"/>
           </a:xfrm>
           <a:prstGeom prst="rect">
@@ -6255,13 +6255,13 @@
             <a:r>
               <a:rPr lang="en-US" sz="900" b="1" spc="110" kern="0" dirty="0">
                 <a:solidFill>
-                  <a:srgbClr val="7C3AED"/>
+                  <a:srgbClr val="B793F5"/>
                 </a:solidFill>
                 <a:latin typeface="BIZ UDPGothic" pitchFamily="34" charset="0"/>
                 <a:ea typeface="BIZ UDPGothic" pitchFamily="34" charset="-122"/>
                 <a:cs typeface="BIZ UDPGothic" pitchFamily="34" charset="-120"/>
               </a:rPr>
-              <a:t>SECTION</a:t>
+              <a:t>最終確認</a:t>
             </a:r>
             <a:endParaRPr lang="en-US" sz="900" dirty="0"/>
           </a:p>
@@ -6478,7 +6478,7 @@
                 <a:ea typeface="BIZ UDPGothic" pitchFamily="34" charset="-122"/>
                 <a:cs typeface="BIZ UDPGothic" pitchFamily="34" charset="-120"/>
               </a:rPr>
-              <a:t>CYCLE</a:t>
+              <a:t>確認時点</a:t>
             </a:r>
             <a:endParaRPr lang="en-US" sz="900" dirty="0"/>
           </a:p>
@@ -6513,13 +6513,13 @@
             <a:r>
               <a:rPr lang="en-US" sz="1594" b="1" dirty="0">
                 <a:solidFill>
-                  <a:srgbClr val="7C3AED"/>
+                  <a:srgbClr val="B793F5"/>
                 </a:solidFill>
                 <a:latin typeface="Shippori Mincho" pitchFamily="34" charset="0"/>
                 <a:ea typeface="Shippori Mincho" pitchFamily="34" charset="-122"/>
                 <a:cs typeface="Shippori Mincho" pitchFamily="34" charset="-120"/>
               </a:rPr>
-              <a:t>01</a:t>
+              <a:t>担当変更前</a:t>
             </a:r>
             <a:endParaRPr lang="en-US" sz="1594" dirty="0"/>
           </a:p>
@@ -6612,7 +6612,7 @@
                 <a:ea typeface="BIZ UDPGothic" pitchFamily="34" charset="-122"/>
                 <a:cs typeface="BIZ UDPGothic" pitchFamily="34" charset="-120"/>
               </a:rPr>
-              <a:t>CONTROL</a:t>
+              <a:t>着手条件</a:t>
             </a:r>
             <a:endParaRPr lang="en-US" sz="900" dirty="0"/>
           </a:p>
@@ -6647,13 +6647,13 @@
             <a:r>
               <a:rPr lang="en-US" sz="1594" b="1" dirty="0">
                 <a:solidFill>
-                  <a:srgbClr val="0E7490"/>
+                  <a:srgbClr val="7AB3C2"/>
                 </a:solidFill>
                 <a:latin typeface="Shippori Mincho" pitchFamily="34" charset="0"/>
                 <a:ea typeface="Shippori Mincho" pitchFamily="34" charset="-122"/>
                 <a:cs typeface="Shippori Mincho" pitchFamily="34" charset="-120"/>
               </a:rPr>
-              <a:t>CONTROL</a:t>
+              <a:t>記録を確認</a:t>
             </a:r>
             <a:endParaRPr lang="en-US" sz="1594" dirty="0"/>
           </a:p>
@@ -6713,7 +6713,7 @@
             <a:r>
               <a:rPr lang="en-US" sz="900" dirty="0">
                 <a:solidFill>
-                  <a:srgbClr val="6D28D9"/>
+                  <a:srgbClr val="CBD5E1"/>
                 </a:solidFill>
                 <a:latin typeface="BIZ UDPGothic" pitchFamily="34" charset="0"/>
                 <a:ea typeface="BIZ UDPGothic" pitchFamily="34" charset="-122"/>
@@ -6752,7 +6752,7 @@
             <a:r>
               <a:rPr lang="en-US" sz="900" dirty="0">
                 <a:solidFill>
-                  <a:srgbClr val="6D28D9"/>
+                  <a:srgbClr val="CBD5E1"/>
                 </a:solidFill>
                 <a:latin typeface="Manrope" pitchFamily="34" charset="0"/>
                 <a:ea typeface="Manrope" pitchFamily="34" charset="-122"/>
